--- a/exp 9.pptx
+++ b/exp 9.pptx
@@ -1,18 +1,18 @@
 
 <file path=ppt/presentation.xml><?xml version="1.0" encoding="utf-8"?>
-<p:presentation xmlns:a="http://schemas.openxmlformats.org/drawingml/2006/main" xmlns:r="http://schemas.openxmlformats.org/officeDocument/2006/relationships" xmlns:p="http://schemas.openxmlformats.org/presentationml/2006/main" saveSubsetFonts="1">
+<p:presentation xmlns:a="http://schemas.openxmlformats.org/drawingml/2006/main" xmlns:r="http://schemas.openxmlformats.org/officeDocument/2006/relationships" xmlns:p="http://schemas.openxmlformats.org/presentationml/2006/main">
   <p:sldMasterIdLst>
     <p:sldMasterId id="2147483648" r:id="rId1"/>
   </p:sldMasterIdLst>
   <p:sldIdLst>
-    <p:sldId id="256" r:id="rId2"/>
-    <p:sldId id="258" r:id="rId3"/>
-    <p:sldId id="259" r:id="rId4"/>
-    <p:sldId id="260" r:id="rId5"/>
-    <p:sldId id="261" r:id="rId6"/>
-    <p:sldId id="262" r:id="rId7"/>
-    <p:sldId id="263" r:id="rId8"/>
-    <p:sldId id="264" r:id="rId9"/>
+    <p:sldId id="256" r:id="rId3"/>
+    <p:sldId id="258" r:id="rId4"/>
+    <p:sldId id="259" r:id="rId5"/>
+    <p:sldId id="260" r:id="rId6"/>
+    <p:sldId id="261" r:id="rId7"/>
+    <p:sldId id="262" r:id="rId8"/>
+    <p:sldId id="263" r:id="rId9"/>
+    <p:sldId id="264" r:id="rId10"/>
   </p:sldIdLst>
   <p:sldSz cx="12192000" cy="6858000"/>
   <p:notesSz cx="6858000" cy="9144000"/>
@@ -133,13 +133,7 @@
       </p:grpSpPr>
       <p:sp>
         <p:nvSpPr>
-          <p:cNvPr id="2" name="Title 1">
-            <a:extLst>
-              <a:ext uri="{FF2B5EF4-FFF2-40B4-BE49-F238E27FC236}">
-                <a16:creationId xmlns:a16="http://schemas.microsoft.com/office/drawing/2014/main" id="{EED88283-DCB9-510C-38F0-9B4A7F25D933}"/>
-              </a:ext>
-            </a:extLst>
-          </p:cNvPr>
+          <p:cNvPr id="2" name="Title 1"/>
           <p:cNvSpPr>
             <a:spLocks noGrp="1"/>
           </p:cNvSpPr>
@@ -171,13 +165,7 @@
       </p:sp>
       <p:sp>
         <p:nvSpPr>
-          <p:cNvPr id="3" name="Subtitle 2">
-            <a:extLst>
-              <a:ext uri="{FF2B5EF4-FFF2-40B4-BE49-F238E27FC236}">
-                <a16:creationId xmlns:a16="http://schemas.microsoft.com/office/drawing/2014/main" id="{2457FB55-FEF2-044A-B2D7-706584BF442D}"/>
-              </a:ext>
-            </a:extLst>
-          </p:cNvPr>
+          <p:cNvPr id="3" name="Subtitle 2"/>
           <p:cNvSpPr>
             <a:spLocks noGrp="1"/>
           </p:cNvSpPr>
@@ -242,13 +230,7 @@
       </p:sp>
       <p:sp>
         <p:nvSpPr>
-          <p:cNvPr id="4" name="Date Placeholder 3">
-            <a:extLst>
-              <a:ext uri="{FF2B5EF4-FFF2-40B4-BE49-F238E27FC236}">
-                <a16:creationId xmlns:a16="http://schemas.microsoft.com/office/drawing/2014/main" id="{1F8BCFEF-5DFD-36C7-4A8A-1C8AC9DE0A1C}"/>
-              </a:ext>
-            </a:extLst>
-          </p:cNvPr>
+          <p:cNvPr id="4" name="Date Placeholder 3"/>
           <p:cNvSpPr>
             <a:spLocks noGrp="1"/>
           </p:cNvSpPr>
@@ -263,7 +245,6 @@
           <a:p>
             <a:fld id="{F97D897D-0869-496F-8301-E314CCA9C6D2}" type="datetimeFigureOut">
               <a:rPr lang="en-IN" smtClean="0"/>
-              <a:t>21-08-2026</a:t>
             </a:fld>
             <a:endParaRPr lang="en-IN"/>
           </a:p>
@@ -271,13 +252,7 @@
       </p:sp>
       <p:sp>
         <p:nvSpPr>
-          <p:cNvPr id="5" name="Footer Placeholder 4">
-            <a:extLst>
-              <a:ext uri="{FF2B5EF4-FFF2-40B4-BE49-F238E27FC236}">
-                <a16:creationId xmlns:a16="http://schemas.microsoft.com/office/drawing/2014/main" id="{72981514-15BE-43AE-7DB7-4B7A086E87CD}"/>
-              </a:ext>
-            </a:extLst>
-          </p:cNvPr>
+          <p:cNvPr id="5" name="Footer Placeholder 4"/>
           <p:cNvSpPr>
             <a:spLocks noGrp="1"/>
           </p:cNvSpPr>
@@ -296,13 +271,7 @@
       </p:sp>
       <p:sp>
         <p:nvSpPr>
-          <p:cNvPr id="6" name="Slide Number Placeholder 5">
-            <a:extLst>
-              <a:ext uri="{FF2B5EF4-FFF2-40B4-BE49-F238E27FC236}">
-                <a16:creationId xmlns:a16="http://schemas.microsoft.com/office/drawing/2014/main" id="{AEF9B057-92EC-6D88-D12B-FE3E66A65963}"/>
-              </a:ext>
-            </a:extLst>
-          </p:cNvPr>
+          <p:cNvPr id="6" name="Slide Number Placeholder 5"/>
           <p:cNvSpPr>
             <a:spLocks noGrp="1"/>
           </p:cNvSpPr>
@@ -317,18 +286,12 @@
           <a:p>
             <a:fld id="{956AE3B2-CC12-4060-B1CC-0B01862B0B7A}" type="slidenum">
               <a:rPr lang="en-IN" smtClean="0"/>
-              <a:t>‹#›</a:t>
             </a:fld>
             <a:endParaRPr lang="en-IN"/>
           </a:p>
         </p:txBody>
       </p:sp>
     </p:spTree>
-    <p:extLst>
-      <p:ext uri="{BB962C8B-B14F-4D97-AF65-F5344CB8AC3E}">
-        <p14:creationId xmlns:p14="http://schemas.microsoft.com/office/powerpoint/2010/main" val="1120045321"/>
-      </p:ext>
-    </p:extLst>
   </p:cSld>
   <p:clrMapOvr>
     <a:masterClrMapping/>
@@ -355,13 +318,7 @@
       </p:grpSpPr>
       <p:sp>
         <p:nvSpPr>
-          <p:cNvPr id="2" name="Title 1">
-            <a:extLst>
-              <a:ext uri="{FF2B5EF4-FFF2-40B4-BE49-F238E27FC236}">
-                <a16:creationId xmlns:a16="http://schemas.microsoft.com/office/drawing/2014/main" id="{29936E11-7D6E-6A53-B674-3F49EF936C5C}"/>
-              </a:ext>
-            </a:extLst>
-          </p:cNvPr>
+          <p:cNvPr id="2" name="Title 1"/>
           <p:cNvSpPr>
             <a:spLocks noGrp="1"/>
           </p:cNvSpPr>
@@ -384,13 +341,7 @@
       </p:sp>
       <p:sp>
         <p:nvSpPr>
-          <p:cNvPr id="3" name="Vertical Text Placeholder 2">
-            <a:extLst>
-              <a:ext uri="{FF2B5EF4-FFF2-40B4-BE49-F238E27FC236}">
-                <a16:creationId xmlns:a16="http://schemas.microsoft.com/office/drawing/2014/main" id="{A85DCD55-E682-1021-B7B0-C36E0D8CD23D}"/>
-              </a:ext>
-            </a:extLst>
-          </p:cNvPr>
+          <p:cNvPr id="3" name="Vertical Text Placeholder 2"/>
           <p:cNvSpPr>
             <a:spLocks noGrp="1"/>
           </p:cNvSpPr>
@@ -408,6 +359,7 @@
               <a:rPr lang="en-US"/>
               <a:t>Click to edit Master text styles</a:t>
             </a:r>
+            <a:endParaRPr lang="en-US"/>
           </a:p>
           <a:p>
             <a:pPr lvl="1"/>
@@ -415,6 +367,7 @@
               <a:rPr lang="en-US"/>
               <a:t>Second level</a:t>
             </a:r>
+            <a:endParaRPr lang="en-US"/>
           </a:p>
           <a:p>
             <a:pPr lvl="2"/>
@@ -422,6 +375,7 @@
               <a:rPr lang="en-US"/>
               <a:t>Third level</a:t>
             </a:r>
+            <a:endParaRPr lang="en-US"/>
           </a:p>
           <a:p>
             <a:pPr lvl="3"/>
@@ -429,6 +383,7 @@
               <a:rPr lang="en-US"/>
               <a:t>Fourth level</a:t>
             </a:r>
+            <a:endParaRPr lang="en-US"/>
           </a:p>
           <a:p>
             <a:pPr lvl="4"/>
@@ -442,13 +397,7 @@
       </p:sp>
       <p:sp>
         <p:nvSpPr>
-          <p:cNvPr id="4" name="Date Placeholder 3">
-            <a:extLst>
-              <a:ext uri="{FF2B5EF4-FFF2-40B4-BE49-F238E27FC236}">
-                <a16:creationId xmlns:a16="http://schemas.microsoft.com/office/drawing/2014/main" id="{3278CC8A-DAAE-4DEB-37B6-985D95AA4A1A}"/>
-              </a:ext>
-            </a:extLst>
-          </p:cNvPr>
+          <p:cNvPr id="4" name="Date Placeholder 3"/>
           <p:cNvSpPr>
             <a:spLocks noGrp="1"/>
           </p:cNvSpPr>
@@ -463,7 +412,6 @@
           <a:p>
             <a:fld id="{F97D897D-0869-496F-8301-E314CCA9C6D2}" type="datetimeFigureOut">
               <a:rPr lang="en-IN" smtClean="0"/>
-              <a:t>21-08-2026</a:t>
             </a:fld>
             <a:endParaRPr lang="en-IN"/>
           </a:p>
@@ -471,13 +419,7 @@
       </p:sp>
       <p:sp>
         <p:nvSpPr>
-          <p:cNvPr id="5" name="Footer Placeholder 4">
-            <a:extLst>
-              <a:ext uri="{FF2B5EF4-FFF2-40B4-BE49-F238E27FC236}">
-                <a16:creationId xmlns:a16="http://schemas.microsoft.com/office/drawing/2014/main" id="{88DB0D4B-BD82-7774-2C23-78DBB876D822}"/>
-              </a:ext>
-            </a:extLst>
-          </p:cNvPr>
+          <p:cNvPr id="5" name="Footer Placeholder 4"/>
           <p:cNvSpPr>
             <a:spLocks noGrp="1"/>
           </p:cNvSpPr>
@@ -496,13 +438,7 @@
       </p:sp>
       <p:sp>
         <p:nvSpPr>
-          <p:cNvPr id="6" name="Slide Number Placeholder 5">
-            <a:extLst>
-              <a:ext uri="{FF2B5EF4-FFF2-40B4-BE49-F238E27FC236}">
-                <a16:creationId xmlns:a16="http://schemas.microsoft.com/office/drawing/2014/main" id="{3EB2E1D0-AE60-48EA-DF0D-67D5C0A19B75}"/>
-              </a:ext>
-            </a:extLst>
-          </p:cNvPr>
+          <p:cNvPr id="6" name="Slide Number Placeholder 5"/>
           <p:cNvSpPr>
             <a:spLocks noGrp="1"/>
           </p:cNvSpPr>
@@ -517,18 +453,12 @@
           <a:p>
             <a:fld id="{956AE3B2-CC12-4060-B1CC-0B01862B0B7A}" type="slidenum">
               <a:rPr lang="en-IN" smtClean="0"/>
-              <a:t>‹#›</a:t>
             </a:fld>
             <a:endParaRPr lang="en-IN"/>
           </a:p>
         </p:txBody>
       </p:sp>
     </p:spTree>
-    <p:extLst>
-      <p:ext uri="{BB962C8B-B14F-4D97-AF65-F5344CB8AC3E}">
-        <p14:creationId xmlns:p14="http://schemas.microsoft.com/office/powerpoint/2010/main" val="306579176"/>
-      </p:ext>
-    </p:extLst>
   </p:cSld>
   <p:clrMapOvr>
     <a:masterClrMapping/>
@@ -555,13 +485,7 @@
       </p:grpSpPr>
       <p:sp>
         <p:nvSpPr>
-          <p:cNvPr id="2" name="Vertical Title 1">
-            <a:extLst>
-              <a:ext uri="{FF2B5EF4-FFF2-40B4-BE49-F238E27FC236}">
-                <a16:creationId xmlns:a16="http://schemas.microsoft.com/office/drawing/2014/main" id="{BF1D2F19-E4D4-ADFE-8682-9CE0526A7E9F}"/>
-              </a:ext>
-            </a:extLst>
-          </p:cNvPr>
+          <p:cNvPr id="2" name="Vertical Title 1"/>
           <p:cNvSpPr>
             <a:spLocks noGrp="1"/>
           </p:cNvSpPr>
@@ -589,13 +513,7 @@
       </p:sp>
       <p:sp>
         <p:nvSpPr>
-          <p:cNvPr id="3" name="Vertical Text Placeholder 2">
-            <a:extLst>
-              <a:ext uri="{FF2B5EF4-FFF2-40B4-BE49-F238E27FC236}">
-                <a16:creationId xmlns:a16="http://schemas.microsoft.com/office/drawing/2014/main" id="{8E58AE80-1D21-56DD-0DD7-FABD11FE4745}"/>
-              </a:ext>
-            </a:extLst>
-          </p:cNvPr>
+          <p:cNvPr id="3" name="Vertical Text Placeholder 2"/>
           <p:cNvSpPr>
             <a:spLocks noGrp="1"/>
           </p:cNvSpPr>
@@ -618,6 +536,7 @@
               <a:rPr lang="en-US"/>
               <a:t>Click to edit Master text styles</a:t>
             </a:r>
+            <a:endParaRPr lang="en-US"/>
           </a:p>
           <a:p>
             <a:pPr lvl="1"/>
@@ -625,6 +544,7 @@
               <a:rPr lang="en-US"/>
               <a:t>Second level</a:t>
             </a:r>
+            <a:endParaRPr lang="en-US"/>
           </a:p>
           <a:p>
             <a:pPr lvl="2"/>
@@ -632,6 +552,7 @@
               <a:rPr lang="en-US"/>
               <a:t>Third level</a:t>
             </a:r>
+            <a:endParaRPr lang="en-US"/>
           </a:p>
           <a:p>
             <a:pPr lvl="3"/>
@@ -639,6 +560,7 @@
               <a:rPr lang="en-US"/>
               <a:t>Fourth level</a:t>
             </a:r>
+            <a:endParaRPr lang="en-US"/>
           </a:p>
           <a:p>
             <a:pPr lvl="4"/>
@@ -652,13 +574,7 @@
       </p:sp>
       <p:sp>
         <p:nvSpPr>
-          <p:cNvPr id="4" name="Date Placeholder 3">
-            <a:extLst>
-              <a:ext uri="{FF2B5EF4-FFF2-40B4-BE49-F238E27FC236}">
-                <a16:creationId xmlns:a16="http://schemas.microsoft.com/office/drawing/2014/main" id="{5F1B49CC-C3DA-2243-8C2C-CEAE162A3A3D}"/>
-              </a:ext>
-            </a:extLst>
-          </p:cNvPr>
+          <p:cNvPr id="4" name="Date Placeholder 3"/>
           <p:cNvSpPr>
             <a:spLocks noGrp="1"/>
           </p:cNvSpPr>
@@ -673,7 +589,6 @@
           <a:p>
             <a:fld id="{F97D897D-0869-496F-8301-E314CCA9C6D2}" type="datetimeFigureOut">
               <a:rPr lang="en-IN" smtClean="0"/>
-              <a:t>21-08-2026</a:t>
             </a:fld>
             <a:endParaRPr lang="en-IN"/>
           </a:p>
@@ -681,13 +596,7 @@
       </p:sp>
       <p:sp>
         <p:nvSpPr>
-          <p:cNvPr id="5" name="Footer Placeholder 4">
-            <a:extLst>
-              <a:ext uri="{FF2B5EF4-FFF2-40B4-BE49-F238E27FC236}">
-                <a16:creationId xmlns:a16="http://schemas.microsoft.com/office/drawing/2014/main" id="{2DA4FEF5-E188-4691-5677-85C7218575A2}"/>
-              </a:ext>
-            </a:extLst>
-          </p:cNvPr>
+          <p:cNvPr id="5" name="Footer Placeholder 4"/>
           <p:cNvSpPr>
             <a:spLocks noGrp="1"/>
           </p:cNvSpPr>
@@ -706,13 +615,7 @@
       </p:sp>
       <p:sp>
         <p:nvSpPr>
-          <p:cNvPr id="6" name="Slide Number Placeholder 5">
-            <a:extLst>
-              <a:ext uri="{FF2B5EF4-FFF2-40B4-BE49-F238E27FC236}">
-                <a16:creationId xmlns:a16="http://schemas.microsoft.com/office/drawing/2014/main" id="{61C9C7FC-417B-81DB-6574-84E0DAE7D2BB}"/>
-              </a:ext>
-            </a:extLst>
-          </p:cNvPr>
+          <p:cNvPr id="6" name="Slide Number Placeholder 5"/>
           <p:cNvSpPr>
             <a:spLocks noGrp="1"/>
           </p:cNvSpPr>
@@ -727,18 +630,12 @@
           <a:p>
             <a:fld id="{956AE3B2-CC12-4060-B1CC-0B01862B0B7A}" type="slidenum">
               <a:rPr lang="en-IN" smtClean="0"/>
-              <a:t>‹#›</a:t>
             </a:fld>
             <a:endParaRPr lang="en-IN"/>
           </a:p>
         </p:txBody>
       </p:sp>
     </p:spTree>
-    <p:extLst>
-      <p:ext uri="{BB962C8B-B14F-4D97-AF65-F5344CB8AC3E}">
-        <p14:creationId xmlns:p14="http://schemas.microsoft.com/office/powerpoint/2010/main" val="2195195437"/>
-      </p:ext>
-    </p:extLst>
   </p:cSld>
   <p:clrMapOvr>
     <a:masterClrMapping/>
@@ -765,13 +662,7 @@
       </p:grpSpPr>
       <p:sp>
         <p:nvSpPr>
-          <p:cNvPr id="2" name="Title 1">
-            <a:extLst>
-              <a:ext uri="{FF2B5EF4-FFF2-40B4-BE49-F238E27FC236}">
-                <a16:creationId xmlns:a16="http://schemas.microsoft.com/office/drawing/2014/main" id="{3A8E1431-8604-C720-81C8-72D8096F7CAB}"/>
-              </a:ext>
-            </a:extLst>
-          </p:cNvPr>
+          <p:cNvPr id="2" name="Title 1"/>
           <p:cNvSpPr>
             <a:spLocks noGrp="1"/>
           </p:cNvSpPr>
@@ -794,13 +685,7 @@
       </p:sp>
       <p:sp>
         <p:nvSpPr>
-          <p:cNvPr id="3" name="Content Placeholder 2">
-            <a:extLst>
-              <a:ext uri="{FF2B5EF4-FFF2-40B4-BE49-F238E27FC236}">
-                <a16:creationId xmlns:a16="http://schemas.microsoft.com/office/drawing/2014/main" id="{E5566A11-44D4-4EF1-93A5-589D332B550A}"/>
-              </a:ext>
-            </a:extLst>
-          </p:cNvPr>
+          <p:cNvPr id="3" name="Content Placeholder 2"/>
           <p:cNvSpPr>
             <a:spLocks noGrp="1"/>
           </p:cNvSpPr>
@@ -818,6 +703,7 @@
               <a:rPr lang="en-US"/>
               <a:t>Click to edit Master text styles</a:t>
             </a:r>
+            <a:endParaRPr lang="en-US"/>
           </a:p>
           <a:p>
             <a:pPr lvl="1"/>
@@ -825,6 +711,7 @@
               <a:rPr lang="en-US"/>
               <a:t>Second level</a:t>
             </a:r>
+            <a:endParaRPr lang="en-US"/>
           </a:p>
           <a:p>
             <a:pPr lvl="2"/>
@@ -832,6 +719,7 @@
               <a:rPr lang="en-US"/>
               <a:t>Third level</a:t>
             </a:r>
+            <a:endParaRPr lang="en-US"/>
           </a:p>
           <a:p>
             <a:pPr lvl="3"/>
@@ -839,6 +727,7 @@
               <a:rPr lang="en-US"/>
               <a:t>Fourth level</a:t>
             </a:r>
+            <a:endParaRPr lang="en-US"/>
           </a:p>
           <a:p>
             <a:pPr lvl="4"/>
@@ -852,13 +741,7 @@
       </p:sp>
       <p:sp>
         <p:nvSpPr>
-          <p:cNvPr id="4" name="Date Placeholder 3">
-            <a:extLst>
-              <a:ext uri="{FF2B5EF4-FFF2-40B4-BE49-F238E27FC236}">
-                <a16:creationId xmlns:a16="http://schemas.microsoft.com/office/drawing/2014/main" id="{378EC218-8A9A-1A15-E4CE-4F0DA4A218B5}"/>
-              </a:ext>
-            </a:extLst>
-          </p:cNvPr>
+          <p:cNvPr id="4" name="Date Placeholder 3"/>
           <p:cNvSpPr>
             <a:spLocks noGrp="1"/>
           </p:cNvSpPr>
@@ -873,7 +756,6 @@
           <a:p>
             <a:fld id="{F97D897D-0869-496F-8301-E314CCA9C6D2}" type="datetimeFigureOut">
               <a:rPr lang="en-IN" smtClean="0"/>
-              <a:t>21-08-2026</a:t>
             </a:fld>
             <a:endParaRPr lang="en-IN"/>
           </a:p>
@@ -881,13 +763,7 @@
       </p:sp>
       <p:sp>
         <p:nvSpPr>
-          <p:cNvPr id="5" name="Footer Placeholder 4">
-            <a:extLst>
-              <a:ext uri="{FF2B5EF4-FFF2-40B4-BE49-F238E27FC236}">
-                <a16:creationId xmlns:a16="http://schemas.microsoft.com/office/drawing/2014/main" id="{FE10D9F7-BE3D-A1E5-848F-C56BC515C85F}"/>
-              </a:ext>
-            </a:extLst>
-          </p:cNvPr>
+          <p:cNvPr id="5" name="Footer Placeholder 4"/>
           <p:cNvSpPr>
             <a:spLocks noGrp="1"/>
           </p:cNvSpPr>
@@ -906,13 +782,7 @@
       </p:sp>
       <p:sp>
         <p:nvSpPr>
-          <p:cNvPr id="6" name="Slide Number Placeholder 5">
-            <a:extLst>
-              <a:ext uri="{FF2B5EF4-FFF2-40B4-BE49-F238E27FC236}">
-                <a16:creationId xmlns:a16="http://schemas.microsoft.com/office/drawing/2014/main" id="{522208EB-FCA6-601B-2622-192EAF629193}"/>
-              </a:ext>
-            </a:extLst>
-          </p:cNvPr>
+          <p:cNvPr id="6" name="Slide Number Placeholder 5"/>
           <p:cNvSpPr>
             <a:spLocks noGrp="1"/>
           </p:cNvSpPr>
@@ -927,18 +797,12 @@
           <a:p>
             <a:fld id="{956AE3B2-CC12-4060-B1CC-0B01862B0B7A}" type="slidenum">
               <a:rPr lang="en-IN" smtClean="0"/>
-              <a:t>‹#›</a:t>
             </a:fld>
             <a:endParaRPr lang="en-IN"/>
           </a:p>
         </p:txBody>
       </p:sp>
     </p:spTree>
-    <p:extLst>
-      <p:ext uri="{BB962C8B-B14F-4D97-AF65-F5344CB8AC3E}">
-        <p14:creationId xmlns:p14="http://schemas.microsoft.com/office/powerpoint/2010/main" val="3623831922"/>
-      </p:ext>
-    </p:extLst>
   </p:cSld>
   <p:clrMapOvr>
     <a:masterClrMapping/>
@@ -965,13 +829,7 @@
       </p:grpSpPr>
       <p:sp>
         <p:nvSpPr>
-          <p:cNvPr id="2" name="Title 1">
-            <a:extLst>
-              <a:ext uri="{FF2B5EF4-FFF2-40B4-BE49-F238E27FC236}">
-                <a16:creationId xmlns:a16="http://schemas.microsoft.com/office/drawing/2014/main" id="{77AFA853-ED08-DDA8-E9BB-19AC71F508E4}"/>
-              </a:ext>
-            </a:extLst>
-          </p:cNvPr>
+          <p:cNvPr id="2" name="Title 1"/>
           <p:cNvSpPr>
             <a:spLocks noGrp="1"/>
           </p:cNvSpPr>
@@ -1003,13 +861,7 @@
       </p:sp>
       <p:sp>
         <p:nvSpPr>
-          <p:cNvPr id="3" name="Text Placeholder 2">
-            <a:extLst>
-              <a:ext uri="{FF2B5EF4-FFF2-40B4-BE49-F238E27FC236}">
-                <a16:creationId xmlns:a16="http://schemas.microsoft.com/office/drawing/2014/main" id="{32159DD3-EA7A-1BED-6B72-B7D46F57EEA3}"/>
-              </a:ext>
-            </a:extLst>
-          </p:cNvPr>
+          <p:cNvPr id="3" name="Text Placeholder 2"/>
           <p:cNvSpPr>
             <a:spLocks noGrp="1"/>
           </p:cNvSpPr>
@@ -1123,18 +975,13 @@
               <a:rPr lang="en-US"/>
               <a:t>Click to edit Master text styles</a:t>
             </a:r>
-          </a:p>
-        </p:txBody>
-      </p:sp>
-      <p:sp>
-        <p:nvSpPr>
-          <p:cNvPr id="4" name="Date Placeholder 3">
-            <a:extLst>
-              <a:ext uri="{FF2B5EF4-FFF2-40B4-BE49-F238E27FC236}">
-                <a16:creationId xmlns:a16="http://schemas.microsoft.com/office/drawing/2014/main" id="{FE91FFEF-E561-EBBD-8173-FA56ABB6D852}"/>
-              </a:ext>
-            </a:extLst>
-          </p:cNvPr>
+            <a:endParaRPr lang="en-US"/>
+          </a:p>
+        </p:txBody>
+      </p:sp>
+      <p:sp>
+        <p:nvSpPr>
+          <p:cNvPr id="4" name="Date Placeholder 3"/>
           <p:cNvSpPr>
             <a:spLocks noGrp="1"/>
           </p:cNvSpPr>
@@ -1149,7 +996,6 @@
           <a:p>
             <a:fld id="{F97D897D-0869-496F-8301-E314CCA9C6D2}" type="datetimeFigureOut">
               <a:rPr lang="en-IN" smtClean="0"/>
-              <a:t>21-08-2026</a:t>
             </a:fld>
             <a:endParaRPr lang="en-IN"/>
           </a:p>
@@ -1157,13 +1003,7 @@
       </p:sp>
       <p:sp>
         <p:nvSpPr>
-          <p:cNvPr id="5" name="Footer Placeholder 4">
-            <a:extLst>
-              <a:ext uri="{FF2B5EF4-FFF2-40B4-BE49-F238E27FC236}">
-                <a16:creationId xmlns:a16="http://schemas.microsoft.com/office/drawing/2014/main" id="{8EEBFE0C-0754-7A10-CC58-2ED5CA57F061}"/>
-              </a:ext>
-            </a:extLst>
-          </p:cNvPr>
+          <p:cNvPr id="5" name="Footer Placeholder 4"/>
           <p:cNvSpPr>
             <a:spLocks noGrp="1"/>
           </p:cNvSpPr>
@@ -1182,13 +1022,7 @@
       </p:sp>
       <p:sp>
         <p:nvSpPr>
-          <p:cNvPr id="6" name="Slide Number Placeholder 5">
-            <a:extLst>
-              <a:ext uri="{FF2B5EF4-FFF2-40B4-BE49-F238E27FC236}">
-                <a16:creationId xmlns:a16="http://schemas.microsoft.com/office/drawing/2014/main" id="{29651D06-EFD2-DB21-EA16-7337368616D9}"/>
-              </a:ext>
-            </a:extLst>
-          </p:cNvPr>
+          <p:cNvPr id="6" name="Slide Number Placeholder 5"/>
           <p:cNvSpPr>
             <a:spLocks noGrp="1"/>
           </p:cNvSpPr>
@@ -1203,18 +1037,12 @@
           <a:p>
             <a:fld id="{956AE3B2-CC12-4060-B1CC-0B01862B0B7A}" type="slidenum">
               <a:rPr lang="en-IN" smtClean="0"/>
-              <a:t>‹#›</a:t>
             </a:fld>
             <a:endParaRPr lang="en-IN"/>
           </a:p>
         </p:txBody>
       </p:sp>
     </p:spTree>
-    <p:extLst>
-      <p:ext uri="{BB962C8B-B14F-4D97-AF65-F5344CB8AC3E}">
-        <p14:creationId xmlns:p14="http://schemas.microsoft.com/office/powerpoint/2010/main" val="310997558"/>
-      </p:ext>
-    </p:extLst>
   </p:cSld>
   <p:clrMapOvr>
     <a:masterClrMapping/>
@@ -1241,13 +1069,7 @@
       </p:grpSpPr>
       <p:sp>
         <p:nvSpPr>
-          <p:cNvPr id="2" name="Title 1">
-            <a:extLst>
-              <a:ext uri="{FF2B5EF4-FFF2-40B4-BE49-F238E27FC236}">
-                <a16:creationId xmlns:a16="http://schemas.microsoft.com/office/drawing/2014/main" id="{A33C5879-8B0B-D562-A297-8B19FD654B69}"/>
-              </a:ext>
-            </a:extLst>
-          </p:cNvPr>
+          <p:cNvPr id="2" name="Title 1"/>
           <p:cNvSpPr>
             <a:spLocks noGrp="1"/>
           </p:cNvSpPr>
@@ -1270,13 +1092,7 @@
       </p:sp>
       <p:sp>
         <p:nvSpPr>
-          <p:cNvPr id="3" name="Content Placeholder 2">
-            <a:extLst>
-              <a:ext uri="{FF2B5EF4-FFF2-40B4-BE49-F238E27FC236}">
-                <a16:creationId xmlns:a16="http://schemas.microsoft.com/office/drawing/2014/main" id="{57223C8F-657C-5298-BF33-7F4B3A143A78}"/>
-              </a:ext>
-            </a:extLst>
-          </p:cNvPr>
+          <p:cNvPr id="3" name="Content Placeholder 2"/>
           <p:cNvSpPr>
             <a:spLocks noGrp="1"/>
           </p:cNvSpPr>
@@ -1299,6 +1115,7 @@
               <a:rPr lang="en-US"/>
               <a:t>Click to edit Master text styles</a:t>
             </a:r>
+            <a:endParaRPr lang="en-US"/>
           </a:p>
           <a:p>
             <a:pPr lvl="1"/>
@@ -1306,6 +1123,7 @@
               <a:rPr lang="en-US"/>
               <a:t>Second level</a:t>
             </a:r>
+            <a:endParaRPr lang="en-US"/>
           </a:p>
           <a:p>
             <a:pPr lvl="2"/>
@@ -1313,6 +1131,7 @@
               <a:rPr lang="en-US"/>
               <a:t>Third level</a:t>
             </a:r>
+            <a:endParaRPr lang="en-US"/>
           </a:p>
           <a:p>
             <a:pPr lvl="3"/>
@@ -1320,6 +1139,7 @@
               <a:rPr lang="en-US"/>
               <a:t>Fourth level</a:t>
             </a:r>
+            <a:endParaRPr lang="en-US"/>
           </a:p>
           <a:p>
             <a:pPr lvl="4"/>
@@ -1333,13 +1153,7 @@
       </p:sp>
       <p:sp>
         <p:nvSpPr>
-          <p:cNvPr id="4" name="Content Placeholder 3">
-            <a:extLst>
-              <a:ext uri="{FF2B5EF4-FFF2-40B4-BE49-F238E27FC236}">
-                <a16:creationId xmlns:a16="http://schemas.microsoft.com/office/drawing/2014/main" id="{9A1320CF-5B33-E4E8-76F8-61605FEBC9F9}"/>
-              </a:ext>
-            </a:extLst>
-          </p:cNvPr>
+          <p:cNvPr id="4" name="Content Placeholder 3"/>
           <p:cNvSpPr>
             <a:spLocks noGrp="1"/>
           </p:cNvSpPr>
@@ -1362,6 +1176,7 @@
               <a:rPr lang="en-US"/>
               <a:t>Click to edit Master text styles</a:t>
             </a:r>
+            <a:endParaRPr lang="en-US"/>
           </a:p>
           <a:p>
             <a:pPr lvl="1"/>
@@ -1369,6 +1184,7 @@
               <a:rPr lang="en-US"/>
               <a:t>Second level</a:t>
             </a:r>
+            <a:endParaRPr lang="en-US"/>
           </a:p>
           <a:p>
             <a:pPr lvl="2"/>
@@ -1376,6 +1192,7 @@
               <a:rPr lang="en-US"/>
               <a:t>Third level</a:t>
             </a:r>
+            <a:endParaRPr lang="en-US"/>
           </a:p>
           <a:p>
             <a:pPr lvl="3"/>
@@ -1383,6 +1200,7 @@
               <a:rPr lang="en-US"/>
               <a:t>Fourth level</a:t>
             </a:r>
+            <a:endParaRPr lang="en-US"/>
           </a:p>
           <a:p>
             <a:pPr lvl="4"/>
@@ -1396,13 +1214,7 @@
       </p:sp>
       <p:sp>
         <p:nvSpPr>
-          <p:cNvPr id="5" name="Date Placeholder 4">
-            <a:extLst>
-              <a:ext uri="{FF2B5EF4-FFF2-40B4-BE49-F238E27FC236}">
-                <a16:creationId xmlns:a16="http://schemas.microsoft.com/office/drawing/2014/main" id="{309DBA6A-C8FC-5B25-7485-75A1D439367A}"/>
-              </a:ext>
-            </a:extLst>
-          </p:cNvPr>
+          <p:cNvPr id="5" name="Date Placeholder 4"/>
           <p:cNvSpPr>
             <a:spLocks noGrp="1"/>
           </p:cNvSpPr>
@@ -1417,7 +1229,6 @@
           <a:p>
             <a:fld id="{F97D897D-0869-496F-8301-E314CCA9C6D2}" type="datetimeFigureOut">
               <a:rPr lang="en-IN" smtClean="0"/>
-              <a:t>21-08-2026</a:t>
             </a:fld>
             <a:endParaRPr lang="en-IN"/>
           </a:p>
@@ -1425,13 +1236,7 @@
       </p:sp>
       <p:sp>
         <p:nvSpPr>
-          <p:cNvPr id="6" name="Footer Placeholder 5">
-            <a:extLst>
-              <a:ext uri="{FF2B5EF4-FFF2-40B4-BE49-F238E27FC236}">
-                <a16:creationId xmlns:a16="http://schemas.microsoft.com/office/drawing/2014/main" id="{A6735624-BB7B-E07F-282C-59685E0A9EB2}"/>
-              </a:ext>
-            </a:extLst>
-          </p:cNvPr>
+          <p:cNvPr id="6" name="Footer Placeholder 5"/>
           <p:cNvSpPr>
             <a:spLocks noGrp="1"/>
           </p:cNvSpPr>
@@ -1450,13 +1255,7 @@
       </p:sp>
       <p:sp>
         <p:nvSpPr>
-          <p:cNvPr id="7" name="Slide Number Placeholder 6">
-            <a:extLst>
-              <a:ext uri="{FF2B5EF4-FFF2-40B4-BE49-F238E27FC236}">
-                <a16:creationId xmlns:a16="http://schemas.microsoft.com/office/drawing/2014/main" id="{CD658755-05F7-2EC1-7C52-C36F0AC10FE5}"/>
-              </a:ext>
-            </a:extLst>
-          </p:cNvPr>
+          <p:cNvPr id="7" name="Slide Number Placeholder 6"/>
           <p:cNvSpPr>
             <a:spLocks noGrp="1"/>
           </p:cNvSpPr>
@@ -1471,18 +1270,12 @@
           <a:p>
             <a:fld id="{956AE3B2-CC12-4060-B1CC-0B01862B0B7A}" type="slidenum">
               <a:rPr lang="en-IN" smtClean="0"/>
-              <a:t>‹#›</a:t>
             </a:fld>
             <a:endParaRPr lang="en-IN"/>
           </a:p>
         </p:txBody>
       </p:sp>
     </p:spTree>
-    <p:extLst>
-      <p:ext uri="{BB962C8B-B14F-4D97-AF65-F5344CB8AC3E}">
-        <p14:creationId xmlns:p14="http://schemas.microsoft.com/office/powerpoint/2010/main" val="3587689749"/>
-      </p:ext>
-    </p:extLst>
   </p:cSld>
   <p:clrMapOvr>
     <a:masterClrMapping/>
@@ -1509,13 +1302,7 @@
       </p:grpSpPr>
       <p:sp>
         <p:nvSpPr>
-          <p:cNvPr id="2" name="Title 1">
-            <a:extLst>
-              <a:ext uri="{FF2B5EF4-FFF2-40B4-BE49-F238E27FC236}">
-                <a16:creationId xmlns:a16="http://schemas.microsoft.com/office/drawing/2014/main" id="{DEB5DD65-B93C-25FE-125A-CC035651B378}"/>
-              </a:ext>
-            </a:extLst>
-          </p:cNvPr>
+          <p:cNvPr id="2" name="Title 1"/>
           <p:cNvSpPr>
             <a:spLocks noGrp="1"/>
           </p:cNvSpPr>
@@ -1543,13 +1330,7 @@
       </p:sp>
       <p:sp>
         <p:nvSpPr>
-          <p:cNvPr id="3" name="Text Placeholder 2">
-            <a:extLst>
-              <a:ext uri="{FF2B5EF4-FFF2-40B4-BE49-F238E27FC236}">
-                <a16:creationId xmlns:a16="http://schemas.microsoft.com/office/drawing/2014/main" id="{3103ADEB-B229-9ECE-3186-C97367CBE74D}"/>
-              </a:ext>
-            </a:extLst>
-          </p:cNvPr>
+          <p:cNvPr id="3" name="Text Placeholder 2"/>
           <p:cNvSpPr>
             <a:spLocks noGrp="1"/>
           </p:cNvSpPr>
@@ -1609,18 +1390,13 @@
               <a:rPr lang="en-US"/>
               <a:t>Click to edit Master text styles</a:t>
             </a:r>
-          </a:p>
-        </p:txBody>
-      </p:sp>
-      <p:sp>
-        <p:nvSpPr>
-          <p:cNvPr id="4" name="Content Placeholder 3">
-            <a:extLst>
-              <a:ext uri="{FF2B5EF4-FFF2-40B4-BE49-F238E27FC236}">
-                <a16:creationId xmlns:a16="http://schemas.microsoft.com/office/drawing/2014/main" id="{D787A4AB-460C-0C54-5537-CD733B3651B3}"/>
-              </a:ext>
-            </a:extLst>
-          </p:cNvPr>
+            <a:endParaRPr lang="en-US"/>
+          </a:p>
+        </p:txBody>
+      </p:sp>
+      <p:sp>
+        <p:nvSpPr>
+          <p:cNvPr id="4" name="Content Placeholder 3"/>
           <p:cNvSpPr>
             <a:spLocks noGrp="1"/>
           </p:cNvSpPr>
@@ -1643,6 +1419,7 @@
               <a:rPr lang="en-US"/>
               <a:t>Click to edit Master text styles</a:t>
             </a:r>
+            <a:endParaRPr lang="en-US"/>
           </a:p>
           <a:p>
             <a:pPr lvl="1"/>
@@ -1650,6 +1427,7 @@
               <a:rPr lang="en-US"/>
               <a:t>Second level</a:t>
             </a:r>
+            <a:endParaRPr lang="en-US"/>
           </a:p>
           <a:p>
             <a:pPr lvl="2"/>
@@ -1657,6 +1435,7 @@
               <a:rPr lang="en-US"/>
               <a:t>Third level</a:t>
             </a:r>
+            <a:endParaRPr lang="en-US"/>
           </a:p>
           <a:p>
             <a:pPr lvl="3"/>
@@ -1664,6 +1443,7 @@
               <a:rPr lang="en-US"/>
               <a:t>Fourth level</a:t>
             </a:r>
+            <a:endParaRPr lang="en-US"/>
           </a:p>
           <a:p>
             <a:pPr lvl="4"/>
@@ -1677,13 +1457,7 @@
       </p:sp>
       <p:sp>
         <p:nvSpPr>
-          <p:cNvPr id="5" name="Text Placeholder 4">
-            <a:extLst>
-              <a:ext uri="{FF2B5EF4-FFF2-40B4-BE49-F238E27FC236}">
-                <a16:creationId xmlns:a16="http://schemas.microsoft.com/office/drawing/2014/main" id="{73676486-42D9-41E0-4FCA-8D74DDDF7428}"/>
-              </a:ext>
-            </a:extLst>
-          </p:cNvPr>
+          <p:cNvPr id="5" name="Text Placeholder 4"/>
           <p:cNvSpPr>
             <a:spLocks noGrp="1"/>
           </p:cNvSpPr>
@@ -1743,18 +1517,13 @@
               <a:rPr lang="en-US"/>
               <a:t>Click to edit Master text styles</a:t>
             </a:r>
-          </a:p>
-        </p:txBody>
-      </p:sp>
-      <p:sp>
-        <p:nvSpPr>
-          <p:cNvPr id="6" name="Content Placeholder 5">
-            <a:extLst>
-              <a:ext uri="{FF2B5EF4-FFF2-40B4-BE49-F238E27FC236}">
-                <a16:creationId xmlns:a16="http://schemas.microsoft.com/office/drawing/2014/main" id="{FAC754E6-92F7-FE3B-86F2-4A1F011B6C69}"/>
-              </a:ext>
-            </a:extLst>
-          </p:cNvPr>
+            <a:endParaRPr lang="en-US"/>
+          </a:p>
+        </p:txBody>
+      </p:sp>
+      <p:sp>
+        <p:nvSpPr>
+          <p:cNvPr id="6" name="Content Placeholder 5"/>
           <p:cNvSpPr>
             <a:spLocks noGrp="1"/>
           </p:cNvSpPr>
@@ -1777,6 +1546,7 @@
               <a:rPr lang="en-US"/>
               <a:t>Click to edit Master text styles</a:t>
             </a:r>
+            <a:endParaRPr lang="en-US"/>
           </a:p>
           <a:p>
             <a:pPr lvl="1"/>
@@ -1784,6 +1554,7 @@
               <a:rPr lang="en-US"/>
               <a:t>Second level</a:t>
             </a:r>
+            <a:endParaRPr lang="en-US"/>
           </a:p>
           <a:p>
             <a:pPr lvl="2"/>
@@ -1791,6 +1562,7 @@
               <a:rPr lang="en-US"/>
               <a:t>Third level</a:t>
             </a:r>
+            <a:endParaRPr lang="en-US"/>
           </a:p>
           <a:p>
             <a:pPr lvl="3"/>
@@ -1798,6 +1570,7 @@
               <a:rPr lang="en-US"/>
               <a:t>Fourth level</a:t>
             </a:r>
+            <a:endParaRPr lang="en-US"/>
           </a:p>
           <a:p>
             <a:pPr lvl="4"/>
@@ -1811,13 +1584,7 @@
       </p:sp>
       <p:sp>
         <p:nvSpPr>
-          <p:cNvPr id="7" name="Date Placeholder 6">
-            <a:extLst>
-              <a:ext uri="{FF2B5EF4-FFF2-40B4-BE49-F238E27FC236}">
-                <a16:creationId xmlns:a16="http://schemas.microsoft.com/office/drawing/2014/main" id="{2FC7B8D1-01C2-4017-9BC1-E04DDD34473B}"/>
-              </a:ext>
-            </a:extLst>
-          </p:cNvPr>
+          <p:cNvPr id="7" name="Date Placeholder 6"/>
           <p:cNvSpPr>
             <a:spLocks noGrp="1"/>
           </p:cNvSpPr>
@@ -1832,7 +1599,6 @@
           <a:p>
             <a:fld id="{F97D897D-0869-496F-8301-E314CCA9C6D2}" type="datetimeFigureOut">
               <a:rPr lang="en-IN" smtClean="0"/>
-              <a:t>21-08-2026</a:t>
             </a:fld>
             <a:endParaRPr lang="en-IN"/>
           </a:p>
@@ -1840,13 +1606,7 @@
       </p:sp>
       <p:sp>
         <p:nvSpPr>
-          <p:cNvPr id="8" name="Footer Placeholder 7">
-            <a:extLst>
-              <a:ext uri="{FF2B5EF4-FFF2-40B4-BE49-F238E27FC236}">
-                <a16:creationId xmlns:a16="http://schemas.microsoft.com/office/drawing/2014/main" id="{06384F4B-ACD6-05F3-D824-715A803F0C45}"/>
-              </a:ext>
-            </a:extLst>
-          </p:cNvPr>
+          <p:cNvPr id="8" name="Footer Placeholder 7"/>
           <p:cNvSpPr>
             <a:spLocks noGrp="1"/>
           </p:cNvSpPr>
@@ -1865,13 +1625,7 @@
       </p:sp>
       <p:sp>
         <p:nvSpPr>
-          <p:cNvPr id="9" name="Slide Number Placeholder 8">
-            <a:extLst>
-              <a:ext uri="{FF2B5EF4-FFF2-40B4-BE49-F238E27FC236}">
-                <a16:creationId xmlns:a16="http://schemas.microsoft.com/office/drawing/2014/main" id="{2B4F1BE0-DB38-F206-3196-3C4ACE9282B4}"/>
-              </a:ext>
-            </a:extLst>
-          </p:cNvPr>
+          <p:cNvPr id="9" name="Slide Number Placeholder 8"/>
           <p:cNvSpPr>
             <a:spLocks noGrp="1"/>
           </p:cNvSpPr>
@@ -1886,18 +1640,12 @@
           <a:p>
             <a:fld id="{956AE3B2-CC12-4060-B1CC-0B01862B0B7A}" type="slidenum">
               <a:rPr lang="en-IN" smtClean="0"/>
-              <a:t>‹#›</a:t>
             </a:fld>
             <a:endParaRPr lang="en-IN"/>
           </a:p>
         </p:txBody>
       </p:sp>
     </p:spTree>
-    <p:extLst>
-      <p:ext uri="{BB962C8B-B14F-4D97-AF65-F5344CB8AC3E}">
-        <p14:creationId xmlns:p14="http://schemas.microsoft.com/office/powerpoint/2010/main" val="499805750"/>
-      </p:ext>
-    </p:extLst>
   </p:cSld>
   <p:clrMapOvr>
     <a:masterClrMapping/>
@@ -1924,13 +1672,7 @@
       </p:grpSpPr>
       <p:sp>
         <p:nvSpPr>
-          <p:cNvPr id="2" name="Title 1">
-            <a:extLst>
-              <a:ext uri="{FF2B5EF4-FFF2-40B4-BE49-F238E27FC236}">
-                <a16:creationId xmlns:a16="http://schemas.microsoft.com/office/drawing/2014/main" id="{8D7DFF97-F6A6-8056-D5AC-DE823DD95B5B}"/>
-              </a:ext>
-            </a:extLst>
-          </p:cNvPr>
+          <p:cNvPr id="2" name="Title 1"/>
           <p:cNvSpPr>
             <a:spLocks noGrp="1"/>
           </p:cNvSpPr>
@@ -1953,13 +1695,7 @@
       </p:sp>
       <p:sp>
         <p:nvSpPr>
-          <p:cNvPr id="3" name="Date Placeholder 2">
-            <a:extLst>
-              <a:ext uri="{FF2B5EF4-FFF2-40B4-BE49-F238E27FC236}">
-                <a16:creationId xmlns:a16="http://schemas.microsoft.com/office/drawing/2014/main" id="{3283C1EF-D764-B7F5-4631-39CCD80E97EE}"/>
-              </a:ext>
-            </a:extLst>
-          </p:cNvPr>
+          <p:cNvPr id="3" name="Date Placeholder 2"/>
           <p:cNvSpPr>
             <a:spLocks noGrp="1"/>
           </p:cNvSpPr>
@@ -1974,7 +1710,6 @@
           <a:p>
             <a:fld id="{F97D897D-0869-496F-8301-E314CCA9C6D2}" type="datetimeFigureOut">
               <a:rPr lang="en-IN" smtClean="0"/>
-              <a:t>21-08-2026</a:t>
             </a:fld>
             <a:endParaRPr lang="en-IN"/>
           </a:p>
@@ -1982,13 +1717,7 @@
       </p:sp>
       <p:sp>
         <p:nvSpPr>
-          <p:cNvPr id="4" name="Footer Placeholder 3">
-            <a:extLst>
-              <a:ext uri="{FF2B5EF4-FFF2-40B4-BE49-F238E27FC236}">
-                <a16:creationId xmlns:a16="http://schemas.microsoft.com/office/drawing/2014/main" id="{27B19DE4-3FDC-EBDC-CE84-A2302B6D1C97}"/>
-              </a:ext>
-            </a:extLst>
-          </p:cNvPr>
+          <p:cNvPr id="4" name="Footer Placeholder 3"/>
           <p:cNvSpPr>
             <a:spLocks noGrp="1"/>
           </p:cNvSpPr>
@@ -2007,13 +1736,7 @@
       </p:sp>
       <p:sp>
         <p:nvSpPr>
-          <p:cNvPr id="5" name="Slide Number Placeholder 4">
-            <a:extLst>
-              <a:ext uri="{FF2B5EF4-FFF2-40B4-BE49-F238E27FC236}">
-                <a16:creationId xmlns:a16="http://schemas.microsoft.com/office/drawing/2014/main" id="{77F0AFBA-ADC3-B780-633A-740EFC3648F9}"/>
-              </a:ext>
-            </a:extLst>
-          </p:cNvPr>
+          <p:cNvPr id="5" name="Slide Number Placeholder 4"/>
           <p:cNvSpPr>
             <a:spLocks noGrp="1"/>
           </p:cNvSpPr>
@@ -2028,18 +1751,12 @@
           <a:p>
             <a:fld id="{956AE3B2-CC12-4060-B1CC-0B01862B0B7A}" type="slidenum">
               <a:rPr lang="en-IN" smtClean="0"/>
-              <a:t>‹#›</a:t>
             </a:fld>
             <a:endParaRPr lang="en-IN"/>
           </a:p>
         </p:txBody>
       </p:sp>
     </p:spTree>
-    <p:extLst>
-      <p:ext uri="{BB962C8B-B14F-4D97-AF65-F5344CB8AC3E}">
-        <p14:creationId xmlns:p14="http://schemas.microsoft.com/office/powerpoint/2010/main" val="750797539"/>
-      </p:ext>
-    </p:extLst>
   </p:cSld>
   <p:clrMapOvr>
     <a:masterClrMapping/>
@@ -2066,13 +1783,7 @@
       </p:grpSpPr>
       <p:sp>
         <p:nvSpPr>
-          <p:cNvPr id="2" name="Date Placeholder 1">
-            <a:extLst>
-              <a:ext uri="{FF2B5EF4-FFF2-40B4-BE49-F238E27FC236}">
-                <a16:creationId xmlns:a16="http://schemas.microsoft.com/office/drawing/2014/main" id="{2ECD1121-AF2B-8530-61C6-27E67B5D132E}"/>
-              </a:ext>
-            </a:extLst>
-          </p:cNvPr>
+          <p:cNvPr id="2" name="Date Placeholder 1"/>
           <p:cNvSpPr>
             <a:spLocks noGrp="1"/>
           </p:cNvSpPr>
@@ -2087,7 +1798,6 @@
           <a:p>
             <a:fld id="{F97D897D-0869-496F-8301-E314CCA9C6D2}" type="datetimeFigureOut">
               <a:rPr lang="en-IN" smtClean="0"/>
-              <a:t>21-08-2026</a:t>
             </a:fld>
             <a:endParaRPr lang="en-IN"/>
           </a:p>
@@ -2095,13 +1805,7 @@
       </p:sp>
       <p:sp>
         <p:nvSpPr>
-          <p:cNvPr id="3" name="Footer Placeholder 2">
-            <a:extLst>
-              <a:ext uri="{FF2B5EF4-FFF2-40B4-BE49-F238E27FC236}">
-                <a16:creationId xmlns:a16="http://schemas.microsoft.com/office/drawing/2014/main" id="{B9D06BA0-9BCF-0CEF-C2E8-492A37F4537E}"/>
-              </a:ext>
-            </a:extLst>
-          </p:cNvPr>
+          <p:cNvPr id="3" name="Footer Placeholder 2"/>
           <p:cNvSpPr>
             <a:spLocks noGrp="1"/>
           </p:cNvSpPr>
@@ -2120,13 +1824,7 @@
       </p:sp>
       <p:sp>
         <p:nvSpPr>
-          <p:cNvPr id="4" name="Slide Number Placeholder 3">
-            <a:extLst>
-              <a:ext uri="{FF2B5EF4-FFF2-40B4-BE49-F238E27FC236}">
-                <a16:creationId xmlns:a16="http://schemas.microsoft.com/office/drawing/2014/main" id="{E8B2F6FF-3FC9-12BA-390E-D578909AD9B2}"/>
-              </a:ext>
-            </a:extLst>
-          </p:cNvPr>
+          <p:cNvPr id="4" name="Slide Number Placeholder 3"/>
           <p:cNvSpPr>
             <a:spLocks noGrp="1"/>
           </p:cNvSpPr>
@@ -2141,18 +1839,12 @@
           <a:p>
             <a:fld id="{956AE3B2-CC12-4060-B1CC-0B01862B0B7A}" type="slidenum">
               <a:rPr lang="en-IN" smtClean="0"/>
-              <a:t>‹#›</a:t>
             </a:fld>
             <a:endParaRPr lang="en-IN"/>
           </a:p>
         </p:txBody>
       </p:sp>
     </p:spTree>
-    <p:extLst>
-      <p:ext uri="{BB962C8B-B14F-4D97-AF65-F5344CB8AC3E}">
-        <p14:creationId xmlns:p14="http://schemas.microsoft.com/office/powerpoint/2010/main" val="1015870089"/>
-      </p:ext>
-    </p:extLst>
   </p:cSld>
   <p:clrMapOvr>
     <a:masterClrMapping/>
@@ -2179,13 +1871,7 @@
       </p:grpSpPr>
       <p:sp>
         <p:nvSpPr>
-          <p:cNvPr id="2" name="Title 1">
-            <a:extLst>
-              <a:ext uri="{FF2B5EF4-FFF2-40B4-BE49-F238E27FC236}">
-                <a16:creationId xmlns:a16="http://schemas.microsoft.com/office/drawing/2014/main" id="{A8BC9EEC-0A92-750D-9ACC-4F473B8265C0}"/>
-              </a:ext>
-            </a:extLst>
-          </p:cNvPr>
+          <p:cNvPr id="2" name="Title 1"/>
           <p:cNvSpPr>
             <a:spLocks noGrp="1"/>
           </p:cNvSpPr>
@@ -2217,13 +1903,7 @@
       </p:sp>
       <p:sp>
         <p:nvSpPr>
-          <p:cNvPr id="3" name="Content Placeholder 2">
-            <a:extLst>
-              <a:ext uri="{FF2B5EF4-FFF2-40B4-BE49-F238E27FC236}">
-                <a16:creationId xmlns:a16="http://schemas.microsoft.com/office/drawing/2014/main" id="{449CF163-B68D-2C54-6493-32FFEA62124A}"/>
-              </a:ext>
-            </a:extLst>
-          </p:cNvPr>
+          <p:cNvPr id="3" name="Content Placeholder 2"/>
           <p:cNvSpPr>
             <a:spLocks noGrp="1"/>
           </p:cNvSpPr>
@@ -2274,6 +1954,7 @@
               <a:rPr lang="en-US"/>
               <a:t>Click to edit Master text styles</a:t>
             </a:r>
+            <a:endParaRPr lang="en-US"/>
           </a:p>
           <a:p>
             <a:pPr lvl="1"/>
@@ -2281,6 +1962,7 @@
               <a:rPr lang="en-US"/>
               <a:t>Second level</a:t>
             </a:r>
+            <a:endParaRPr lang="en-US"/>
           </a:p>
           <a:p>
             <a:pPr lvl="2"/>
@@ -2288,6 +1970,7 @@
               <a:rPr lang="en-US"/>
               <a:t>Third level</a:t>
             </a:r>
+            <a:endParaRPr lang="en-US"/>
           </a:p>
           <a:p>
             <a:pPr lvl="3"/>
@@ -2295,6 +1978,7 @@
               <a:rPr lang="en-US"/>
               <a:t>Fourth level</a:t>
             </a:r>
+            <a:endParaRPr lang="en-US"/>
           </a:p>
           <a:p>
             <a:pPr lvl="4"/>
@@ -2308,13 +1992,7 @@
       </p:sp>
       <p:sp>
         <p:nvSpPr>
-          <p:cNvPr id="4" name="Text Placeholder 3">
-            <a:extLst>
-              <a:ext uri="{FF2B5EF4-FFF2-40B4-BE49-F238E27FC236}">
-                <a16:creationId xmlns:a16="http://schemas.microsoft.com/office/drawing/2014/main" id="{0DBCA433-EE4A-3A13-B121-3DFC3E9F06A9}"/>
-              </a:ext>
-            </a:extLst>
-          </p:cNvPr>
+          <p:cNvPr id="4" name="Text Placeholder 3"/>
           <p:cNvSpPr>
             <a:spLocks noGrp="1"/>
           </p:cNvSpPr>
@@ -2374,18 +2052,13 @@
               <a:rPr lang="en-US"/>
               <a:t>Click to edit Master text styles</a:t>
             </a:r>
-          </a:p>
-        </p:txBody>
-      </p:sp>
-      <p:sp>
-        <p:nvSpPr>
-          <p:cNvPr id="5" name="Date Placeholder 4">
-            <a:extLst>
-              <a:ext uri="{FF2B5EF4-FFF2-40B4-BE49-F238E27FC236}">
-                <a16:creationId xmlns:a16="http://schemas.microsoft.com/office/drawing/2014/main" id="{5A9B6C5D-6520-0B82-927A-400314D6CD50}"/>
-              </a:ext>
-            </a:extLst>
-          </p:cNvPr>
+            <a:endParaRPr lang="en-US"/>
+          </a:p>
+        </p:txBody>
+      </p:sp>
+      <p:sp>
+        <p:nvSpPr>
+          <p:cNvPr id="5" name="Date Placeholder 4"/>
           <p:cNvSpPr>
             <a:spLocks noGrp="1"/>
           </p:cNvSpPr>
@@ -2400,7 +2073,6 @@
           <a:p>
             <a:fld id="{F97D897D-0869-496F-8301-E314CCA9C6D2}" type="datetimeFigureOut">
               <a:rPr lang="en-IN" smtClean="0"/>
-              <a:t>21-08-2026</a:t>
             </a:fld>
             <a:endParaRPr lang="en-IN"/>
           </a:p>
@@ -2408,13 +2080,7 @@
       </p:sp>
       <p:sp>
         <p:nvSpPr>
-          <p:cNvPr id="6" name="Footer Placeholder 5">
-            <a:extLst>
-              <a:ext uri="{FF2B5EF4-FFF2-40B4-BE49-F238E27FC236}">
-                <a16:creationId xmlns:a16="http://schemas.microsoft.com/office/drawing/2014/main" id="{DDB6CF2F-7C67-3924-6303-E72740FB5AAA}"/>
-              </a:ext>
-            </a:extLst>
-          </p:cNvPr>
+          <p:cNvPr id="6" name="Footer Placeholder 5"/>
           <p:cNvSpPr>
             <a:spLocks noGrp="1"/>
           </p:cNvSpPr>
@@ -2433,13 +2099,7 @@
       </p:sp>
       <p:sp>
         <p:nvSpPr>
-          <p:cNvPr id="7" name="Slide Number Placeholder 6">
-            <a:extLst>
-              <a:ext uri="{FF2B5EF4-FFF2-40B4-BE49-F238E27FC236}">
-                <a16:creationId xmlns:a16="http://schemas.microsoft.com/office/drawing/2014/main" id="{FE5C37B2-8E85-86E4-584A-706674C3786B}"/>
-              </a:ext>
-            </a:extLst>
-          </p:cNvPr>
+          <p:cNvPr id="7" name="Slide Number Placeholder 6"/>
           <p:cNvSpPr>
             <a:spLocks noGrp="1"/>
           </p:cNvSpPr>
@@ -2454,18 +2114,12 @@
           <a:p>
             <a:fld id="{956AE3B2-CC12-4060-B1CC-0B01862B0B7A}" type="slidenum">
               <a:rPr lang="en-IN" smtClean="0"/>
-              <a:t>‹#›</a:t>
             </a:fld>
             <a:endParaRPr lang="en-IN"/>
           </a:p>
         </p:txBody>
       </p:sp>
     </p:spTree>
-    <p:extLst>
-      <p:ext uri="{BB962C8B-B14F-4D97-AF65-F5344CB8AC3E}">
-        <p14:creationId xmlns:p14="http://schemas.microsoft.com/office/powerpoint/2010/main" val="3328367685"/>
-      </p:ext>
-    </p:extLst>
   </p:cSld>
   <p:clrMapOvr>
     <a:masterClrMapping/>
@@ -2492,13 +2146,7 @@
       </p:grpSpPr>
       <p:sp>
         <p:nvSpPr>
-          <p:cNvPr id="2" name="Title 1">
-            <a:extLst>
-              <a:ext uri="{FF2B5EF4-FFF2-40B4-BE49-F238E27FC236}">
-                <a16:creationId xmlns:a16="http://schemas.microsoft.com/office/drawing/2014/main" id="{D4FEC070-487A-4787-0835-3BECEC69B411}"/>
-              </a:ext>
-            </a:extLst>
-          </p:cNvPr>
+          <p:cNvPr id="2" name="Title 1"/>
           <p:cNvSpPr>
             <a:spLocks noGrp="1"/>
           </p:cNvSpPr>
@@ -2530,13 +2178,7 @@
       </p:sp>
       <p:sp>
         <p:nvSpPr>
-          <p:cNvPr id="3" name="Picture Placeholder 2">
-            <a:extLst>
-              <a:ext uri="{FF2B5EF4-FFF2-40B4-BE49-F238E27FC236}">
-                <a16:creationId xmlns:a16="http://schemas.microsoft.com/office/drawing/2014/main" id="{3FC43633-8409-B9F1-C7FE-4B27543383A3}"/>
-              </a:ext>
-            </a:extLst>
-          </p:cNvPr>
+          <p:cNvPr id="3" name="Picture Placeholder 2"/>
           <p:cNvSpPr>
             <a:spLocks noGrp="1"/>
           </p:cNvSpPr>
@@ -2597,13 +2239,7 @@
       </p:sp>
       <p:sp>
         <p:nvSpPr>
-          <p:cNvPr id="4" name="Text Placeholder 3">
-            <a:extLst>
-              <a:ext uri="{FF2B5EF4-FFF2-40B4-BE49-F238E27FC236}">
-                <a16:creationId xmlns:a16="http://schemas.microsoft.com/office/drawing/2014/main" id="{6C1059B3-2B86-AAE3-FFB5-74EFA8086D4A}"/>
-              </a:ext>
-            </a:extLst>
-          </p:cNvPr>
+          <p:cNvPr id="4" name="Text Placeholder 3"/>
           <p:cNvSpPr>
             <a:spLocks noGrp="1"/>
           </p:cNvSpPr>
@@ -2663,18 +2299,13 @@
               <a:rPr lang="en-US"/>
               <a:t>Click to edit Master text styles</a:t>
             </a:r>
-          </a:p>
-        </p:txBody>
-      </p:sp>
-      <p:sp>
-        <p:nvSpPr>
-          <p:cNvPr id="5" name="Date Placeholder 4">
-            <a:extLst>
-              <a:ext uri="{FF2B5EF4-FFF2-40B4-BE49-F238E27FC236}">
-                <a16:creationId xmlns:a16="http://schemas.microsoft.com/office/drawing/2014/main" id="{E1DD07C8-2A7E-FCFD-910C-C5CC55046A84}"/>
-              </a:ext>
-            </a:extLst>
-          </p:cNvPr>
+            <a:endParaRPr lang="en-US"/>
+          </a:p>
+        </p:txBody>
+      </p:sp>
+      <p:sp>
+        <p:nvSpPr>
+          <p:cNvPr id="5" name="Date Placeholder 4"/>
           <p:cNvSpPr>
             <a:spLocks noGrp="1"/>
           </p:cNvSpPr>
@@ -2689,7 +2320,6 @@
           <a:p>
             <a:fld id="{F97D897D-0869-496F-8301-E314CCA9C6D2}" type="datetimeFigureOut">
               <a:rPr lang="en-IN" smtClean="0"/>
-              <a:t>21-08-2026</a:t>
             </a:fld>
             <a:endParaRPr lang="en-IN"/>
           </a:p>
@@ -2697,13 +2327,7 @@
       </p:sp>
       <p:sp>
         <p:nvSpPr>
-          <p:cNvPr id="6" name="Footer Placeholder 5">
-            <a:extLst>
-              <a:ext uri="{FF2B5EF4-FFF2-40B4-BE49-F238E27FC236}">
-                <a16:creationId xmlns:a16="http://schemas.microsoft.com/office/drawing/2014/main" id="{78D8CDD2-7854-0B16-5834-DB73803090D0}"/>
-              </a:ext>
-            </a:extLst>
-          </p:cNvPr>
+          <p:cNvPr id="6" name="Footer Placeholder 5"/>
           <p:cNvSpPr>
             <a:spLocks noGrp="1"/>
           </p:cNvSpPr>
@@ -2722,13 +2346,7 @@
       </p:sp>
       <p:sp>
         <p:nvSpPr>
-          <p:cNvPr id="7" name="Slide Number Placeholder 6">
-            <a:extLst>
-              <a:ext uri="{FF2B5EF4-FFF2-40B4-BE49-F238E27FC236}">
-                <a16:creationId xmlns:a16="http://schemas.microsoft.com/office/drawing/2014/main" id="{86D8A4B7-70F5-E39E-A1B9-212ACA88F962}"/>
-              </a:ext>
-            </a:extLst>
-          </p:cNvPr>
+          <p:cNvPr id="7" name="Slide Number Placeholder 6"/>
           <p:cNvSpPr>
             <a:spLocks noGrp="1"/>
           </p:cNvSpPr>
@@ -2743,18 +2361,12 @@
           <a:p>
             <a:fld id="{956AE3B2-CC12-4060-B1CC-0B01862B0B7A}" type="slidenum">
               <a:rPr lang="en-IN" smtClean="0"/>
-              <a:t>‹#›</a:t>
             </a:fld>
             <a:endParaRPr lang="en-IN"/>
           </a:p>
         </p:txBody>
       </p:sp>
     </p:spTree>
-    <p:extLst>
-      <p:ext uri="{BB962C8B-B14F-4D97-AF65-F5344CB8AC3E}">
-        <p14:creationId xmlns:p14="http://schemas.microsoft.com/office/powerpoint/2010/main" val="3738899677"/>
-      </p:ext>
-    </p:extLst>
   </p:cSld>
   <p:clrMapOvr>
     <a:masterClrMapping/>
@@ -2786,13 +2398,7 @@
       </p:grpSpPr>
       <p:sp>
         <p:nvSpPr>
-          <p:cNvPr id="2" name="Title Placeholder 1">
-            <a:extLst>
-              <a:ext uri="{FF2B5EF4-FFF2-40B4-BE49-F238E27FC236}">
-                <a16:creationId xmlns:a16="http://schemas.microsoft.com/office/drawing/2014/main" id="{685783E4-D865-28C9-B59B-AE2BDF54D68E}"/>
-              </a:ext>
-            </a:extLst>
-          </p:cNvPr>
+          <p:cNvPr id="2" name="Title Placeholder 1"/>
           <p:cNvSpPr>
             <a:spLocks noGrp="1"/>
           </p:cNvSpPr>
@@ -2825,13 +2431,7 @@
       </p:sp>
       <p:sp>
         <p:nvSpPr>
-          <p:cNvPr id="3" name="Text Placeholder 2">
-            <a:extLst>
-              <a:ext uri="{FF2B5EF4-FFF2-40B4-BE49-F238E27FC236}">
-                <a16:creationId xmlns:a16="http://schemas.microsoft.com/office/drawing/2014/main" id="{98438C06-FFE5-3BC9-DC3D-7A8229EBCDA3}"/>
-              </a:ext>
-            </a:extLst>
-          </p:cNvPr>
+          <p:cNvPr id="3" name="Text Placeholder 2"/>
           <p:cNvSpPr>
             <a:spLocks noGrp="1"/>
           </p:cNvSpPr>
@@ -2859,6 +2459,7 @@
               <a:rPr lang="en-US"/>
               <a:t>Click to edit Master text styles</a:t>
             </a:r>
+            <a:endParaRPr lang="en-US"/>
           </a:p>
           <a:p>
             <a:pPr lvl="1"/>
@@ -2866,6 +2467,7 @@
               <a:rPr lang="en-US"/>
               <a:t>Second level</a:t>
             </a:r>
+            <a:endParaRPr lang="en-US"/>
           </a:p>
           <a:p>
             <a:pPr lvl="2"/>
@@ -2873,6 +2475,7 @@
               <a:rPr lang="en-US"/>
               <a:t>Third level</a:t>
             </a:r>
+            <a:endParaRPr lang="en-US"/>
           </a:p>
           <a:p>
             <a:pPr lvl="3"/>
@@ -2880,6 +2483,7 @@
               <a:rPr lang="en-US"/>
               <a:t>Fourth level</a:t>
             </a:r>
+            <a:endParaRPr lang="en-US"/>
           </a:p>
           <a:p>
             <a:pPr lvl="4"/>
@@ -2893,13 +2497,7 @@
       </p:sp>
       <p:sp>
         <p:nvSpPr>
-          <p:cNvPr id="4" name="Date Placeholder 3">
-            <a:extLst>
-              <a:ext uri="{FF2B5EF4-FFF2-40B4-BE49-F238E27FC236}">
-                <a16:creationId xmlns:a16="http://schemas.microsoft.com/office/drawing/2014/main" id="{C78F684D-B828-5762-B234-8020FE6E5711}"/>
-              </a:ext>
-            </a:extLst>
-          </p:cNvPr>
+          <p:cNvPr id="4" name="Date Placeholder 3"/>
           <p:cNvSpPr>
             <a:spLocks noGrp="1"/>
           </p:cNvSpPr>
@@ -2932,7 +2530,6 @@
           <a:p>
             <a:fld id="{F97D897D-0869-496F-8301-E314CCA9C6D2}" type="datetimeFigureOut">
               <a:rPr lang="en-IN" smtClean="0"/>
-              <a:t>21-08-2026</a:t>
             </a:fld>
             <a:endParaRPr lang="en-IN"/>
           </a:p>
@@ -2940,13 +2537,7 @@
       </p:sp>
       <p:sp>
         <p:nvSpPr>
-          <p:cNvPr id="5" name="Footer Placeholder 4">
-            <a:extLst>
-              <a:ext uri="{FF2B5EF4-FFF2-40B4-BE49-F238E27FC236}">
-                <a16:creationId xmlns:a16="http://schemas.microsoft.com/office/drawing/2014/main" id="{9544B519-EA42-EE64-8097-714E8835AC6C}"/>
-              </a:ext>
-            </a:extLst>
-          </p:cNvPr>
+          <p:cNvPr id="5" name="Footer Placeholder 4"/>
           <p:cNvSpPr>
             <a:spLocks noGrp="1"/>
           </p:cNvSpPr>
@@ -2983,13 +2574,7 @@
       </p:sp>
       <p:sp>
         <p:nvSpPr>
-          <p:cNvPr id="6" name="Slide Number Placeholder 5">
-            <a:extLst>
-              <a:ext uri="{FF2B5EF4-FFF2-40B4-BE49-F238E27FC236}">
-                <a16:creationId xmlns:a16="http://schemas.microsoft.com/office/drawing/2014/main" id="{2C829D19-32BC-4558-B779-2138B48B66B5}"/>
-              </a:ext>
-            </a:extLst>
-          </p:cNvPr>
+          <p:cNvPr id="6" name="Slide Number Placeholder 5"/>
           <p:cNvSpPr>
             <a:spLocks noGrp="1"/>
           </p:cNvSpPr>
@@ -3022,18 +2607,12 @@
           <a:p>
             <a:fld id="{956AE3B2-CC12-4060-B1CC-0B01862B0B7A}" type="slidenum">
               <a:rPr lang="en-IN" smtClean="0"/>
-              <a:t>‹#›</a:t>
             </a:fld>
             <a:endParaRPr lang="en-IN"/>
           </a:p>
         </p:txBody>
       </p:sp>
     </p:spTree>
-    <p:extLst>
-      <p:ext uri="{BB962C8B-B14F-4D97-AF65-F5344CB8AC3E}">
-        <p14:creationId xmlns:p14="http://schemas.microsoft.com/office/powerpoint/2010/main" val="377080119"/>
-      </p:ext>
-    </p:extLst>
   </p:cSld>
   <p:clrMap bg1="lt1" tx1="dk1" bg2="lt2" tx2="dk2" accent1="accent1" accent2="accent2" accent3="accent3" accent4="accent4" accent5="accent5" accent6="accent6" hlink="hlink" folHlink="folHlink"/>
   <p:sldLayoutIdLst>
@@ -3351,13 +2930,7 @@
       </p:grpSpPr>
       <p:sp>
         <p:nvSpPr>
-          <p:cNvPr id="2" name="Title 1">
-            <a:extLst>
-              <a:ext uri="{FF2B5EF4-FFF2-40B4-BE49-F238E27FC236}">
-                <a16:creationId xmlns:a16="http://schemas.microsoft.com/office/drawing/2014/main" id="{92A437FB-A840-1865-596C-BD7044DE2557}"/>
-              </a:ext>
-            </a:extLst>
-          </p:cNvPr>
+          <p:cNvPr id="2" name="Title 1"/>
           <p:cNvSpPr>
             <a:spLocks noGrp="1"/>
           </p:cNvSpPr>
@@ -3376,13 +2949,7 @@
       </p:sp>
       <p:sp>
         <p:nvSpPr>
-          <p:cNvPr id="3" name="Subtitle 2">
-            <a:extLst>
-              <a:ext uri="{FF2B5EF4-FFF2-40B4-BE49-F238E27FC236}">
-                <a16:creationId xmlns:a16="http://schemas.microsoft.com/office/drawing/2014/main" id="{1BA4B155-19DD-8F90-2ADC-9CD91125B7B7}"/>
-              </a:ext>
-            </a:extLst>
-          </p:cNvPr>
+          <p:cNvPr id="3" name="Subtitle 2"/>
           <p:cNvSpPr>
             <a:spLocks noGrp="1"/>
           </p:cNvSpPr>
@@ -3401,20 +2968,14 @@
       </p:sp>
       <p:pic>
         <p:nvPicPr>
-          <p:cNvPr id="5" name="Picture 4">
-            <a:extLst>
-              <a:ext uri="{FF2B5EF4-FFF2-40B4-BE49-F238E27FC236}">
-                <a16:creationId xmlns:a16="http://schemas.microsoft.com/office/drawing/2014/main" id="{5F34D44B-728C-EA81-B3DB-76EEAEBC985C}"/>
-              </a:ext>
-            </a:extLst>
-          </p:cNvPr>
+          <p:cNvPr id="5" name="Picture 4"/>
           <p:cNvPicPr>
             <a:picLocks noChangeAspect="1"/>
           </p:cNvPicPr>
           <p:nvPr/>
         </p:nvPicPr>
         <p:blipFill>
-          <a:blip r:embed="rId2"/>
+          <a:blip r:embed="rId1"/>
           <a:stretch>
             <a:fillRect/>
           </a:stretch>
@@ -3431,20 +2992,14 @@
       </p:pic>
       <p:sp>
         <p:nvSpPr>
-          <p:cNvPr id="6" name="TextBox 5">
-            <a:extLst>
-              <a:ext uri="{FF2B5EF4-FFF2-40B4-BE49-F238E27FC236}">
-                <a16:creationId xmlns:a16="http://schemas.microsoft.com/office/drawing/2014/main" id="{76A5FA34-36B9-E755-B843-4924E80F9932}"/>
-              </a:ext>
-            </a:extLst>
-          </p:cNvPr>
+          <p:cNvPr id="6" name="TextBox 5"/>
           <p:cNvSpPr txBox="1"/>
           <p:nvPr/>
         </p:nvSpPr>
         <p:spPr>
           <a:xfrm>
             <a:off x="9861754" y="5469997"/>
-            <a:ext cx="1906291" cy="369332"/>
+            <a:ext cx="2387600" cy="368300"/>
           </a:xfrm>
           <a:prstGeom prst="rect">
             <a:avLst/>
@@ -3458,28 +3013,29 @@
           <a:lstStyle/>
           <a:p>
             <a:r>
-              <a:rPr lang="en-IN" dirty="0"/>
+              <a:rPr lang="en-IN" b="1" dirty="0">
+                <a:latin typeface="Times New Roman" panose="02020603050405020304" charset="0"/>
+                <a:cs typeface="Times New Roman" panose="02020603050405020304" charset="0"/>
+              </a:rPr>
               <a:t>MRS.THIVYA PRIYA</a:t>
             </a:r>
-          </a:p>
-        </p:txBody>
-      </p:sp>
-      <p:sp>
-        <p:nvSpPr>
-          <p:cNvPr id="7" name="TextBox 6">
-            <a:extLst>
-              <a:ext uri="{FF2B5EF4-FFF2-40B4-BE49-F238E27FC236}">
-                <a16:creationId xmlns:a16="http://schemas.microsoft.com/office/drawing/2014/main" id="{391A885F-BDEF-FE8F-1F9C-91CA8E5927D8}"/>
-              </a:ext>
-            </a:extLst>
-          </p:cNvPr>
+            <a:endParaRPr lang="en-IN" b="1" dirty="0">
+              <a:latin typeface="Times New Roman" panose="02020603050405020304" charset="0"/>
+              <a:cs typeface="Times New Roman" panose="02020603050405020304" charset="0"/>
+            </a:endParaRPr>
+          </a:p>
+        </p:txBody>
+      </p:sp>
+      <p:sp>
+        <p:nvSpPr>
+          <p:cNvPr id="4" name="TextBox 5"/>
           <p:cNvSpPr txBox="1"/>
           <p:nvPr/>
         </p:nvSpPr>
         <p:spPr>
           <a:xfrm>
-            <a:off x="934065" y="5496232"/>
-            <a:ext cx="1152880" cy="646331"/>
+            <a:off x="765379" y="5469997"/>
+            <a:ext cx="1395095" cy="368300"/>
           </a:xfrm>
           <a:prstGeom prst="rect">
             <a:avLst/>
@@ -3493,24 +3049,20 @@
           <a:lstStyle/>
           <a:p>
             <a:r>
-              <a:rPr lang="en-IN" dirty="0"/>
-              <a:t>MONIKA S</a:t>
-            </a:r>
-          </a:p>
-          <a:p>
-            <a:r>
-              <a:rPr lang="en-IN" dirty="0"/>
-              <a:t>24CS0544</a:t>
-            </a:r>
+              <a:rPr lang="en-US" altLang="en-IN" b="1" dirty="0">
+                <a:latin typeface="Times New Roman" panose="02020603050405020304" charset="0"/>
+                <a:cs typeface="Times New Roman" panose="02020603050405020304" charset="0"/>
+              </a:rPr>
+              <a:t>KAVIYA RS</a:t>
+            </a:r>
+            <a:endParaRPr lang="en-US" altLang="en-IN" b="1" dirty="0">
+              <a:latin typeface="Times New Roman" panose="02020603050405020304" charset="0"/>
+              <a:cs typeface="Times New Roman" panose="02020603050405020304" charset="0"/>
+            </a:endParaRPr>
           </a:p>
         </p:txBody>
       </p:sp>
     </p:spTree>
-    <p:extLst>
-      <p:ext uri="{BB962C8B-B14F-4D97-AF65-F5344CB8AC3E}">
-        <p14:creationId xmlns:p14="http://schemas.microsoft.com/office/powerpoint/2010/main" val="190049467"/>
-      </p:ext>
-    </p:extLst>
   </p:cSld>
   <p:clrMapOvr>
     <a:masterClrMapping/>
@@ -3537,20 +3089,14 @@
       </p:grpSpPr>
       <p:pic>
         <p:nvPicPr>
-          <p:cNvPr id="3" name="Picture 2">
-            <a:extLst>
-              <a:ext uri="{FF2B5EF4-FFF2-40B4-BE49-F238E27FC236}">
-                <a16:creationId xmlns:a16="http://schemas.microsoft.com/office/drawing/2014/main" id="{B95DF17C-6CCA-31C2-22A3-1FF3694D5C31}"/>
-              </a:ext>
-            </a:extLst>
-          </p:cNvPr>
+          <p:cNvPr id="3" name="Picture 2"/>
           <p:cNvPicPr>
             <a:picLocks noChangeAspect="1"/>
           </p:cNvPicPr>
           <p:nvPr/>
         </p:nvPicPr>
         <p:blipFill>
-          <a:blip r:embed="rId2"/>
+          <a:blip r:embed="rId1"/>
           <a:stretch>
             <a:fillRect/>
           </a:stretch>
@@ -3566,11 +3112,6 @@
         </p:spPr>
       </p:pic>
     </p:spTree>
-    <p:extLst>
-      <p:ext uri="{BB962C8B-B14F-4D97-AF65-F5344CB8AC3E}">
-        <p14:creationId xmlns:p14="http://schemas.microsoft.com/office/powerpoint/2010/main" val="1508905273"/>
-      </p:ext>
-    </p:extLst>
   </p:cSld>
   <p:clrMapOvr>
     <a:masterClrMapping/>
@@ -3597,20 +3138,14 @@
       </p:grpSpPr>
       <p:pic>
         <p:nvPicPr>
-          <p:cNvPr id="3" name="Picture 2">
-            <a:extLst>
-              <a:ext uri="{FF2B5EF4-FFF2-40B4-BE49-F238E27FC236}">
-                <a16:creationId xmlns:a16="http://schemas.microsoft.com/office/drawing/2014/main" id="{461FEB1C-01B7-91E2-E465-1C20F8A62F03}"/>
-              </a:ext>
-            </a:extLst>
-          </p:cNvPr>
+          <p:cNvPr id="3" name="Picture 2"/>
           <p:cNvPicPr>
             <a:picLocks noChangeAspect="1"/>
           </p:cNvPicPr>
           <p:nvPr/>
         </p:nvPicPr>
         <p:blipFill>
-          <a:blip r:embed="rId2"/>
+          <a:blip r:embed="rId1"/>
           <a:stretch>
             <a:fillRect/>
           </a:stretch>
@@ -3626,11 +3161,6 @@
         </p:spPr>
       </p:pic>
     </p:spTree>
-    <p:extLst>
-      <p:ext uri="{BB962C8B-B14F-4D97-AF65-F5344CB8AC3E}">
-        <p14:creationId xmlns:p14="http://schemas.microsoft.com/office/powerpoint/2010/main" val="2696382292"/>
-      </p:ext>
-    </p:extLst>
   </p:cSld>
   <p:clrMapOvr>
     <a:masterClrMapping/>
@@ -3657,20 +3187,14 @@
       </p:grpSpPr>
       <p:pic>
         <p:nvPicPr>
-          <p:cNvPr id="3" name="Picture 2">
-            <a:extLst>
-              <a:ext uri="{FF2B5EF4-FFF2-40B4-BE49-F238E27FC236}">
-                <a16:creationId xmlns:a16="http://schemas.microsoft.com/office/drawing/2014/main" id="{26D372E2-2DB3-3240-6B1D-3F08B4D64D51}"/>
-              </a:ext>
-            </a:extLst>
-          </p:cNvPr>
+          <p:cNvPr id="3" name="Picture 2"/>
           <p:cNvPicPr>
             <a:picLocks noChangeAspect="1"/>
           </p:cNvPicPr>
           <p:nvPr/>
         </p:nvPicPr>
         <p:blipFill>
-          <a:blip r:embed="rId2"/>
+          <a:blip r:embed="rId1"/>
           <a:stretch>
             <a:fillRect/>
           </a:stretch>
@@ -3686,11 +3210,6 @@
         </p:spPr>
       </p:pic>
     </p:spTree>
-    <p:extLst>
-      <p:ext uri="{BB962C8B-B14F-4D97-AF65-F5344CB8AC3E}">
-        <p14:creationId xmlns:p14="http://schemas.microsoft.com/office/powerpoint/2010/main" val="539389948"/>
-      </p:ext>
-    </p:extLst>
   </p:cSld>
   <p:clrMapOvr>
     <a:masterClrMapping/>
@@ -3717,20 +3236,14 @@
       </p:grpSpPr>
       <p:pic>
         <p:nvPicPr>
-          <p:cNvPr id="3" name="Picture 2">
-            <a:extLst>
-              <a:ext uri="{FF2B5EF4-FFF2-40B4-BE49-F238E27FC236}">
-                <a16:creationId xmlns:a16="http://schemas.microsoft.com/office/drawing/2014/main" id="{85FDCE0E-D88A-F52B-6636-E8BD227BE0AE}"/>
-              </a:ext>
-            </a:extLst>
-          </p:cNvPr>
+          <p:cNvPr id="3" name="Picture 2"/>
           <p:cNvPicPr>
             <a:picLocks noChangeAspect="1"/>
           </p:cNvPicPr>
           <p:nvPr/>
         </p:nvPicPr>
         <p:blipFill>
-          <a:blip r:embed="rId2"/>
+          <a:blip r:embed="rId1"/>
           <a:stretch>
             <a:fillRect/>
           </a:stretch>
@@ -3746,11 +3259,6 @@
         </p:spPr>
       </p:pic>
     </p:spTree>
-    <p:extLst>
-      <p:ext uri="{BB962C8B-B14F-4D97-AF65-F5344CB8AC3E}">
-        <p14:creationId xmlns:p14="http://schemas.microsoft.com/office/powerpoint/2010/main" val="3440189133"/>
-      </p:ext>
-    </p:extLst>
   </p:cSld>
   <p:clrMapOvr>
     <a:masterClrMapping/>
@@ -3777,20 +3285,14 @@
       </p:grpSpPr>
       <p:pic>
         <p:nvPicPr>
-          <p:cNvPr id="3" name="Picture 2">
-            <a:extLst>
-              <a:ext uri="{FF2B5EF4-FFF2-40B4-BE49-F238E27FC236}">
-                <a16:creationId xmlns:a16="http://schemas.microsoft.com/office/drawing/2014/main" id="{05B30359-B4F6-D2AA-62FC-D16C889FBBD7}"/>
-              </a:ext>
-            </a:extLst>
-          </p:cNvPr>
+          <p:cNvPr id="3" name="Picture 2"/>
           <p:cNvPicPr>
             <a:picLocks noChangeAspect="1"/>
           </p:cNvPicPr>
           <p:nvPr/>
         </p:nvPicPr>
         <p:blipFill>
-          <a:blip r:embed="rId2"/>
+          <a:blip r:embed="rId1"/>
           <a:stretch>
             <a:fillRect/>
           </a:stretch>
@@ -3806,11 +3308,6 @@
         </p:spPr>
       </p:pic>
     </p:spTree>
-    <p:extLst>
-      <p:ext uri="{BB962C8B-B14F-4D97-AF65-F5344CB8AC3E}">
-        <p14:creationId xmlns:p14="http://schemas.microsoft.com/office/powerpoint/2010/main" val="2908751231"/>
-      </p:ext>
-    </p:extLst>
   </p:cSld>
   <p:clrMapOvr>
     <a:masterClrMapping/>
@@ -3837,20 +3334,14 @@
       </p:grpSpPr>
       <p:pic>
         <p:nvPicPr>
-          <p:cNvPr id="3" name="Picture 2">
-            <a:extLst>
-              <a:ext uri="{FF2B5EF4-FFF2-40B4-BE49-F238E27FC236}">
-                <a16:creationId xmlns:a16="http://schemas.microsoft.com/office/drawing/2014/main" id="{FF586F18-5634-EDED-7420-2EEAAF522A2E}"/>
-              </a:ext>
-            </a:extLst>
-          </p:cNvPr>
+          <p:cNvPr id="3" name="Picture 2"/>
           <p:cNvPicPr>
             <a:picLocks noChangeAspect="1"/>
           </p:cNvPicPr>
           <p:nvPr/>
         </p:nvPicPr>
         <p:blipFill>
-          <a:blip r:embed="rId2"/>
+          <a:blip r:embed="rId1"/>
           <a:stretch>
             <a:fillRect/>
           </a:stretch>
@@ -3866,11 +3357,6 @@
         </p:spPr>
       </p:pic>
     </p:spTree>
-    <p:extLst>
-      <p:ext uri="{BB962C8B-B14F-4D97-AF65-F5344CB8AC3E}">
-        <p14:creationId xmlns:p14="http://schemas.microsoft.com/office/powerpoint/2010/main" val="1338245920"/>
-      </p:ext>
-    </p:extLst>
   </p:cSld>
   <p:clrMapOvr>
     <a:masterClrMapping/>
@@ -3897,20 +3383,14 @@
       </p:grpSpPr>
       <p:pic>
         <p:nvPicPr>
-          <p:cNvPr id="3" name="Picture 2">
-            <a:extLst>
-              <a:ext uri="{FF2B5EF4-FFF2-40B4-BE49-F238E27FC236}">
-                <a16:creationId xmlns:a16="http://schemas.microsoft.com/office/drawing/2014/main" id="{4105BEA4-78A0-30E5-CF6D-71C70EDE038C}"/>
-              </a:ext>
-            </a:extLst>
-          </p:cNvPr>
+          <p:cNvPr id="3" name="Picture 2"/>
           <p:cNvPicPr>
             <a:picLocks noChangeAspect="1"/>
           </p:cNvPicPr>
           <p:nvPr/>
         </p:nvPicPr>
         <p:blipFill>
-          <a:blip r:embed="rId2"/>
+          <a:blip r:embed="rId1"/>
           <a:stretch>
             <a:fillRect/>
           </a:stretch>
@@ -3926,11 +3406,6 @@
         </p:spPr>
       </p:pic>
     </p:spTree>
-    <p:extLst>
-      <p:ext uri="{BB962C8B-B14F-4D97-AF65-F5344CB8AC3E}">
-        <p14:creationId xmlns:p14="http://schemas.microsoft.com/office/powerpoint/2010/main" val="1727776550"/>
-      </p:ext>
-    </p:extLst>
   </p:cSld>
   <p:clrMapOvr>
     <a:masterClrMapping/>
@@ -3981,7 +3456,7 @@
     </a:clrScheme>
     <a:fontScheme name="Office">
       <a:majorFont>
-        <a:latin typeface="Calibri Light" panose="020F0302020204030204"/>
+        <a:latin typeface="Calibri Light"/>
         <a:ea typeface=""/>
         <a:cs typeface=""/>
         <a:font script="Jpan" typeface="游ゴシック Light"/>
@@ -4014,26 +3489,9 @@
         <a:font script="Viet" typeface="Times New Roman"/>
         <a:font script="Uigh" typeface="Microsoft Uighur"/>
         <a:font script="Geor" typeface="Sylfaen"/>
-        <a:font script="Armn" typeface="Arial"/>
-        <a:font script="Bugi" typeface="Leelawadee UI"/>
-        <a:font script="Bopo" typeface="Microsoft JhengHei"/>
-        <a:font script="Java" typeface="Javanese Text"/>
-        <a:font script="Lisu" typeface="Segoe UI"/>
-        <a:font script="Mymr" typeface="Myanmar Text"/>
-        <a:font script="Nkoo" typeface="Ebrima"/>
-        <a:font script="Olck" typeface="Nirmala UI"/>
-        <a:font script="Osma" typeface="Ebrima"/>
-        <a:font script="Phag" typeface="Phagspa"/>
-        <a:font script="Syrn" typeface="Estrangelo Edessa"/>
-        <a:font script="Syrj" typeface="Estrangelo Edessa"/>
-        <a:font script="Syre" typeface="Estrangelo Edessa"/>
-        <a:font script="Sora" typeface="Nirmala UI"/>
-        <a:font script="Tale" typeface="Microsoft Tai Le"/>
-        <a:font script="Talu" typeface="Microsoft New Tai Lue"/>
-        <a:font script="Tfng" typeface="Ebrima"/>
       </a:majorFont>
       <a:minorFont>
-        <a:latin typeface="Calibri" panose="020F0502020204030204"/>
+        <a:latin typeface="Calibri"/>
         <a:ea typeface=""/>
         <a:cs typeface=""/>
         <a:font script="Jpan" typeface="游ゴシック"/>
@@ -4066,23 +3524,6 @@
         <a:font script="Viet" typeface="Arial"/>
         <a:font script="Uigh" typeface="Microsoft Uighur"/>
         <a:font script="Geor" typeface="Sylfaen"/>
-        <a:font script="Armn" typeface="Arial"/>
-        <a:font script="Bugi" typeface="Leelawadee UI"/>
-        <a:font script="Bopo" typeface="Microsoft JhengHei"/>
-        <a:font script="Java" typeface="Javanese Text"/>
-        <a:font script="Lisu" typeface="Segoe UI"/>
-        <a:font script="Mymr" typeface="Myanmar Text"/>
-        <a:font script="Nkoo" typeface="Ebrima"/>
-        <a:font script="Olck" typeface="Nirmala UI"/>
-        <a:font script="Osma" typeface="Ebrima"/>
-        <a:font script="Phag" typeface="Phagspa"/>
-        <a:font script="Syrn" typeface="Estrangelo Edessa"/>
-        <a:font script="Syrj" typeface="Estrangelo Edessa"/>
-        <a:font script="Syre" typeface="Estrangelo Edessa"/>
-        <a:font script="Sora" typeface="Nirmala UI"/>
-        <a:font script="Tale" typeface="Microsoft Tai Le"/>
-        <a:font script="Talu" typeface="Microsoft New Tai Lue"/>
-        <a:font script="Tfng" typeface="Ebrima"/>
       </a:minorFont>
     </a:fontScheme>
     <a:fmtScheme name="Office">
@@ -4223,8 +3664,6 @@
       </a:bgFillStyleLst>
     </a:fmtScheme>
   </a:themeElements>
-  <a:objectDefaults/>
-  <a:extraClrSchemeLst/>
   <a:extLst>
     <a:ext uri="{05A4C25C-085E-4340-85A3-A5531E510DB2}">
       <thm15:themeFamily xmlns:thm15="http://schemas.microsoft.com/office/thememl/2012/main" name="Office Theme" id="{62F939B6-93AF-4DB8-9C6B-D6C7DFDC589F}" vid="{4A3C46E8-61CC-4603-A589-7422A47A8E4A}"/>
